--- a/slides/2-5a_capnography_basics/2-5a_capnography_basics.pptx
+++ b/slides/2-5a_capnography_basics/2-5a_capnography_basics.pptx
@@ -2124,7 +2124,7 @@
           <a:ln/>
         </p:spPr>
         <p:txBody>
-          <a:bodyPr wrap="square" lIns="0" tIns="0" rIns="0" bIns="0" rtlCol="0" anchor="ctr"/>
+          <a:bodyPr wrap="none" lIns="0" tIns="0" rIns="0" bIns="0" rtlCol="0" anchor="ctr"/>
           <a:lstStyle/>
           <a:p>
             <a:pPr algn="ctr" indent="0" marL="0">
@@ -2167,7 +2167,7 @@
           <a:ln/>
         </p:spPr>
         <p:txBody>
-          <a:bodyPr wrap="square" lIns="0" tIns="0" rIns="0" bIns="0" rtlCol="0" anchor="ctr"/>
+          <a:bodyPr wrap="none" lIns="0" tIns="0" rIns="0" bIns="0" rtlCol="0" anchor="ctr"/>
           <a:lstStyle/>
           <a:p>
             <a:pPr algn="ctr" indent="0" marL="0">
@@ -2210,7 +2210,7 @@
           <a:ln/>
         </p:spPr>
         <p:txBody>
-          <a:bodyPr wrap="square" lIns="0" tIns="0" rIns="0" bIns="0" rtlCol="0" anchor="ctr"/>
+          <a:bodyPr wrap="none" lIns="0" tIns="0" rIns="0" bIns="0" rtlCol="0" anchor="ctr"/>
           <a:lstStyle/>
           <a:p>
             <a:pPr algn="ctr" indent="0" marL="0">
@@ -2253,7 +2253,7 @@
           <a:ln/>
         </p:spPr>
         <p:txBody>
-          <a:bodyPr wrap="square" lIns="0" tIns="0" rIns="0" bIns="0" rtlCol="0" anchor="ctr"/>
+          <a:bodyPr wrap="none" lIns="0" tIns="0" rIns="0" bIns="0" rtlCol="0" anchor="ctr"/>
           <a:lstStyle/>
           <a:p>
             <a:pPr algn="ctr" indent="0" marL="0">
@@ -2296,7 +2296,7 @@
           <a:ln/>
         </p:spPr>
         <p:txBody>
-          <a:bodyPr wrap="square" lIns="0" tIns="0" rIns="0" bIns="0" rtlCol="0" anchor="ctr"/>
+          <a:bodyPr wrap="none" lIns="0" tIns="0" rIns="0" bIns="0" rtlCol="0" anchor="ctr"/>
           <a:lstStyle/>
           <a:p>
             <a:pPr algn="ctr" indent="0" marL="0">
@@ -3097,7 +3097,7 @@
           <a:ln/>
         </p:spPr>
         <p:txBody>
-          <a:bodyPr wrap="square" lIns="0" tIns="0" rIns="0" bIns="0" rtlCol="0" anchor="ctr"/>
+          <a:bodyPr wrap="none" lIns="0" tIns="0" rIns="0" bIns="0" rtlCol="0" anchor="ctr"/>
           <a:lstStyle/>
           <a:p>
             <a:pPr algn="ctr" indent="0" marL="0">
@@ -3140,7 +3140,7 @@
           <a:ln/>
         </p:spPr>
         <p:txBody>
-          <a:bodyPr wrap="square" lIns="0" tIns="0" rIns="0" bIns="0" rtlCol="0" anchor="ctr"/>
+          <a:bodyPr wrap="none" lIns="0" tIns="0" rIns="0" bIns="0" rtlCol="0" anchor="ctr"/>
           <a:lstStyle/>
           <a:p>
             <a:pPr algn="ctr" indent="0" marL="0">
@@ -3183,7 +3183,7 @@
           <a:ln/>
         </p:spPr>
         <p:txBody>
-          <a:bodyPr wrap="square" lIns="0" tIns="0" rIns="0" bIns="0" rtlCol="0" anchor="ctr"/>
+          <a:bodyPr wrap="none" lIns="0" tIns="0" rIns="0" bIns="0" rtlCol="0" anchor="ctr"/>
           <a:lstStyle/>
           <a:p>
             <a:pPr algn="ctr" indent="0" marL="0">
@@ -3226,7 +3226,7 @@
           <a:ln/>
         </p:spPr>
         <p:txBody>
-          <a:bodyPr wrap="square" lIns="0" tIns="0" rIns="0" bIns="0" rtlCol="0" anchor="ctr"/>
+          <a:bodyPr wrap="none" lIns="0" tIns="0" rIns="0" bIns="0" rtlCol="0" anchor="ctr"/>
           <a:lstStyle/>
           <a:p>
             <a:pPr algn="ctr" indent="0" marL="0">
@@ -3269,7 +3269,7 @@
           <a:ln/>
         </p:spPr>
         <p:txBody>
-          <a:bodyPr wrap="square" lIns="0" tIns="0" rIns="0" bIns="0" rtlCol="0" anchor="ctr"/>
+          <a:bodyPr wrap="none" lIns="0" tIns="0" rIns="0" bIns="0" rtlCol="0" anchor="ctr"/>
           <a:lstStyle/>
           <a:p>
             <a:pPr algn="ctr" indent="0" marL="0">
@@ -4015,7 +4015,7 @@
           <a:ln/>
         </p:spPr>
         <p:txBody>
-          <a:bodyPr wrap="square" lIns="0" tIns="0" rIns="0" bIns="0" rtlCol="0" anchor="ctr"/>
+          <a:bodyPr wrap="none" lIns="0" tIns="0" rIns="0" bIns="0" rtlCol="0" anchor="ctr"/>
           <a:lstStyle/>
           <a:p>
             <a:pPr algn="ctr" indent="0" marL="0">
@@ -4058,7 +4058,7 @@
           <a:ln/>
         </p:spPr>
         <p:txBody>
-          <a:bodyPr wrap="square" lIns="0" tIns="0" rIns="0" bIns="0" rtlCol="0" anchor="ctr"/>
+          <a:bodyPr wrap="none" lIns="0" tIns="0" rIns="0" bIns="0" rtlCol="0" anchor="ctr"/>
           <a:lstStyle/>
           <a:p>
             <a:pPr algn="ctr" indent="0" marL="0">
@@ -4101,7 +4101,7 @@
           <a:ln/>
         </p:spPr>
         <p:txBody>
-          <a:bodyPr wrap="square" lIns="0" tIns="0" rIns="0" bIns="0" rtlCol="0" anchor="ctr"/>
+          <a:bodyPr wrap="none" lIns="0" tIns="0" rIns="0" bIns="0" rtlCol="0" anchor="ctr"/>
           <a:lstStyle/>
           <a:p>
             <a:pPr algn="ctr" indent="0" marL="0">
@@ -4144,7 +4144,7 @@
           <a:ln/>
         </p:spPr>
         <p:txBody>
-          <a:bodyPr wrap="square" lIns="0" tIns="0" rIns="0" bIns="0" rtlCol="0" anchor="ctr"/>
+          <a:bodyPr wrap="none" lIns="0" tIns="0" rIns="0" bIns="0" rtlCol="0" anchor="ctr"/>
           <a:lstStyle/>
           <a:p>
             <a:pPr algn="ctr" indent="0" marL="0">
@@ -4187,7 +4187,7 @@
           <a:ln/>
         </p:spPr>
         <p:txBody>
-          <a:bodyPr wrap="square" lIns="0" tIns="0" rIns="0" bIns="0" rtlCol="0" anchor="ctr"/>
+          <a:bodyPr wrap="none" lIns="0" tIns="0" rIns="0" bIns="0" rtlCol="0" anchor="ctr"/>
           <a:lstStyle/>
           <a:p>
             <a:pPr algn="ctr" indent="0" marL="0">
@@ -5594,7 +5594,7 @@
           <a:ln/>
         </p:spPr>
         <p:txBody>
-          <a:bodyPr wrap="square" lIns="0" tIns="0" rIns="0" bIns="0" rtlCol="0" anchor="ctr"/>
+          <a:bodyPr wrap="none" lIns="0" tIns="0" rIns="0" bIns="0" rtlCol="0" anchor="ctr"/>
           <a:lstStyle/>
           <a:p>
             <a:pPr algn="ctr" indent="0" marL="0">
@@ -5637,7 +5637,7 @@
           <a:ln/>
         </p:spPr>
         <p:txBody>
-          <a:bodyPr wrap="square" lIns="0" tIns="0" rIns="0" bIns="0" rtlCol="0" anchor="ctr"/>
+          <a:bodyPr wrap="none" lIns="0" tIns="0" rIns="0" bIns="0" rtlCol="0" anchor="ctr"/>
           <a:lstStyle/>
           <a:p>
             <a:pPr algn="ctr" indent="0" marL="0">
@@ -5680,7 +5680,7 @@
           <a:ln/>
         </p:spPr>
         <p:txBody>
-          <a:bodyPr wrap="square" lIns="0" tIns="0" rIns="0" bIns="0" rtlCol="0" anchor="ctr"/>
+          <a:bodyPr wrap="none" lIns="0" tIns="0" rIns="0" bIns="0" rtlCol="0" anchor="ctr"/>
           <a:lstStyle/>
           <a:p>
             <a:pPr algn="ctr" indent="0" marL="0">
@@ -5723,7 +5723,7 @@
           <a:ln/>
         </p:spPr>
         <p:txBody>
-          <a:bodyPr wrap="square" lIns="0" tIns="0" rIns="0" bIns="0" rtlCol="0" anchor="ctr"/>
+          <a:bodyPr wrap="none" lIns="0" tIns="0" rIns="0" bIns="0" rtlCol="0" anchor="ctr"/>
           <a:lstStyle/>
           <a:p>
             <a:pPr algn="ctr" indent="0" marL="0">
@@ -5766,7 +5766,7 @@
           <a:ln/>
         </p:spPr>
         <p:txBody>
-          <a:bodyPr wrap="square" lIns="0" tIns="0" rIns="0" bIns="0" rtlCol="0" anchor="ctr"/>
+          <a:bodyPr wrap="none" lIns="0" tIns="0" rIns="0" bIns="0" rtlCol="0" anchor="ctr"/>
           <a:lstStyle/>
           <a:p>
             <a:pPr algn="ctr" indent="0" marL="0">
@@ -6207,7 +6207,7 @@
           <a:ln/>
         </p:spPr>
         <p:txBody>
-          <a:bodyPr wrap="square" lIns="0" tIns="0" rIns="0" bIns="0" rtlCol="0" anchor="ctr"/>
+          <a:bodyPr wrap="none" lIns="0" tIns="0" rIns="0" bIns="0" rtlCol="0" anchor="ctr"/>
           <a:lstStyle/>
           <a:p>
             <a:pPr algn="ctr" indent="0" marL="0">
@@ -6250,7 +6250,7 @@
           <a:ln/>
         </p:spPr>
         <p:txBody>
-          <a:bodyPr wrap="square" lIns="0" tIns="0" rIns="0" bIns="0" rtlCol="0" anchor="ctr"/>
+          <a:bodyPr wrap="none" lIns="0" tIns="0" rIns="0" bIns="0" rtlCol="0" anchor="ctr"/>
           <a:lstStyle/>
           <a:p>
             <a:pPr algn="ctr" indent="0" marL="0">
@@ -6293,7 +6293,7 @@
           <a:ln/>
         </p:spPr>
         <p:txBody>
-          <a:bodyPr wrap="square" lIns="0" tIns="0" rIns="0" bIns="0" rtlCol="0" anchor="ctr"/>
+          <a:bodyPr wrap="none" lIns="0" tIns="0" rIns="0" bIns="0" rtlCol="0" anchor="ctr"/>
           <a:lstStyle/>
           <a:p>
             <a:pPr algn="ctr" indent="0" marL="0">
@@ -6336,7 +6336,7 @@
           <a:ln/>
         </p:spPr>
         <p:txBody>
-          <a:bodyPr wrap="square" lIns="0" tIns="0" rIns="0" bIns="0" rtlCol="0" anchor="ctr"/>
+          <a:bodyPr wrap="none" lIns="0" tIns="0" rIns="0" bIns="0" rtlCol="0" anchor="ctr"/>
           <a:lstStyle/>
           <a:p>
             <a:pPr algn="ctr" indent="0" marL="0">
@@ -6379,7 +6379,7 @@
           <a:ln/>
         </p:spPr>
         <p:txBody>
-          <a:bodyPr wrap="square" lIns="0" tIns="0" rIns="0" bIns="0" rtlCol="0" anchor="ctr"/>
+          <a:bodyPr wrap="none" lIns="0" tIns="0" rIns="0" bIns="0" rtlCol="0" anchor="ctr"/>
           <a:lstStyle/>
           <a:p>
             <a:pPr algn="ctr" indent="0" marL="0">
@@ -7510,7 +7510,7 @@
           <a:ln/>
         </p:spPr>
         <p:txBody>
-          <a:bodyPr wrap="square" lIns="0" tIns="0" rIns="0" bIns="0" rtlCol="0" anchor="ctr"/>
+          <a:bodyPr wrap="none" lIns="0" tIns="0" rIns="0" bIns="0" rtlCol="0" anchor="ctr"/>
           <a:lstStyle/>
           <a:p>
             <a:pPr algn="ctr" indent="0" marL="0">
@@ -7553,7 +7553,7 @@
           <a:ln/>
         </p:spPr>
         <p:txBody>
-          <a:bodyPr wrap="square" lIns="0" tIns="0" rIns="0" bIns="0" rtlCol="0" anchor="ctr"/>
+          <a:bodyPr wrap="none" lIns="0" tIns="0" rIns="0" bIns="0" rtlCol="0" anchor="ctr"/>
           <a:lstStyle/>
           <a:p>
             <a:pPr algn="ctr" indent="0" marL="0">
@@ -7596,7 +7596,7 @@
           <a:ln/>
         </p:spPr>
         <p:txBody>
-          <a:bodyPr wrap="square" lIns="0" tIns="0" rIns="0" bIns="0" rtlCol="0" anchor="ctr"/>
+          <a:bodyPr wrap="none" lIns="0" tIns="0" rIns="0" bIns="0" rtlCol="0" anchor="ctr"/>
           <a:lstStyle/>
           <a:p>
             <a:pPr algn="ctr" indent="0" marL="0">
@@ -7639,7 +7639,7 @@
           <a:ln/>
         </p:spPr>
         <p:txBody>
-          <a:bodyPr wrap="square" lIns="0" tIns="0" rIns="0" bIns="0" rtlCol="0" anchor="ctr"/>
+          <a:bodyPr wrap="none" lIns="0" tIns="0" rIns="0" bIns="0" rtlCol="0" anchor="ctr"/>
           <a:lstStyle/>
           <a:p>
             <a:pPr algn="ctr" indent="0" marL="0">
@@ -7682,7 +7682,7 @@
           <a:ln/>
         </p:spPr>
         <p:txBody>
-          <a:bodyPr wrap="square" lIns="0" tIns="0" rIns="0" bIns="0" rtlCol="0" anchor="ctr"/>
+          <a:bodyPr wrap="none" lIns="0" tIns="0" rIns="0" bIns="0" rtlCol="0" anchor="ctr"/>
           <a:lstStyle/>
           <a:p>
             <a:pPr algn="ctr" indent="0" marL="0">
@@ -8246,7 +8246,7 @@
           <a:ln/>
         </p:spPr>
         <p:txBody>
-          <a:bodyPr wrap="square" lIns="0" tIns="0" rIns="0" bIns="0" rtlCol="0" anchor="ctr"/>
+          <a:bodyPr wrap="none" lIns="0" tIns="0" rIns="0" bIns="0" rtlCol="0" anchor="ctr"/>
           <a:lstStyle/>
           <a:p>
             <a:pPr algn="ctr" indent="0" marL="0">
@@ -8289,7 +8289,7 @@
           <a:ln/>
         </p:spPr>
         <p:txBody>
-          <a:bodyPr wrap="square" lIns="0" tIns="0" rIns="0" bIns="0" rtlCol="0" anchor="ctr"/>
+          <a:bodyPr wrap="none" lIns="0" tIns="0" rIns="0" bIns="0" rtlCol="0" anchor="ctr"/>
           <a:lstStyle/>
           <a:p>
             <a:pPr algn="ctr" indent="0" marL="0">
@@ -8332,7 +8332,7 @@
           <a:ln/>
         </p:spPr>
         <p:txBody>
-          <a:bodyPr wrap="square" lIns="0" tIns="0" rIns="0" bIns="0" rtlCol="0" anchor="ctr"/>
+          <a:bodyPr wrap="none" lIns="0" tIns="0" rIns="0" bIns="0" rtlCol="0" anchor="ctr"/>
           <a:lstStyle/>
           <a:p>
             <a:pPr algn="ctr" indent="0" marL="0">
@@ -8375,7 +8375,7 @@
           <a:ln/>
         </p:spPr>
         <p:txBody>
-          <a:bodyPr wrap="square" lIns="0" tIns="0" rIns="0" bIns="0" rtlCol="0" anchor="ctr"/>
+          <a:bodyPr wrap="none" lIns="0" tIns="0" rIns="0" bIns="0" rtlCol="0" anchor="ctr"/>
           <a:lstStyle/>
           <a:p>
             <a:pPr algn="ctr" indent="0" marL="0">
@@ -8418,7 +8418,7 @@
           <a:ln/>
         </p:spPr>
         <p:txBody>
-          <a:bodyPr wrap="square" lIns="0" tIns="0" rIns="0" bIns="0" rtlCol="0" anchor="ctr"/>
+          <a:bodyPr wrap="none" lIns="0" tIns="0" rIns="0" bIns="0" rtlCol="0" anchor="ctr"/>
           <a:lstStyle/>
           <a:p>
             <a:pPr algn="ctr" indent="0" marL="0">
@@ -9142,7 +9142,7 @@
           <a:ln/>
         </p:spPr>
         <p:txBody>
-          <a:bodyPr wrap="square" lIns="0" tIns="0" rIns="0" bIns="0" rtlCol="0" anchor="ctr"/>
+          <a:bodyPr wrap="none" lIns="0" tIns="0" rIns="0" bIns="0" rtlCol="0" anchor="ctr"/>
           <a:lstStyle/>
           <a:p>
             <a:pPr algn="ctr" indent="0" marL="0">
@@ -9185,7 +9185,7 @@
           <a:ln/>
         </p:spPr>
         <p:txBody>
-          <a:bodyPr wrap="square" lIns="0" tIns="0" rIns="0" bIns="0" rtlCol="0" anchor="ctr"/>
+          <a:bodyPr wrap="none" lIns="0" tIns="0" rIns="0" bIns="0" rtlCol="0" anchor="ctr"/>
           <a:lstStyle/>
           <a:p>
             <a:pPr algn="ctr" indent="0" marL="0">
@@ -9228,7 +9228,7 @@
           <a:ln/>
         </p:spPr>
         <p:txBody>
-          <a:bodyPr wrap="square" lIns="0" tIns="0" rIns="0" bIns="0" rtlCol="0" anchor="ctr"/>
+          <a:bodyPr wrap="none" lIns="0" tIns="0" rIns="0" bIns="0" rtlCol="0" anchor="ctr"/>
           <a:lstStyle/>
           <a:p>
             <a:pPr algn="ctr" indent="0" marL="0">
@@ -9271,7 +9271,7 @@
           <a:ln/>
         </p:spPr>
         <p:txBody>
-          <a:bodyPr wrap="square" lIns="0" tIns="0" rIns="0" bIns="0" rtlCol="0" anchor="ctr"/>
+          <a:bodyPr wrap="none" lIns="0" tIns="0" rIns="0" bIns="0" rtlCol="0" anchor="ctr"/>
           <a:lstStyle/>
           <a:p>
             <a:pPr algn="ctr" indent="0" marL="0">
@@ -9314,7 +9314,7 @@
           <a:ln/>
         </p:spPr>
         <p:txBody>
-          <a:bodyPr wrap="square" lIns="0" tIns="0" rIns="0" bIns="0" rtlCol="0" anchor="ctr"/>
+          <a:bodyPr wrap="none" lIns="0" tIns="0" rIns="0" bIns="0" rtlCol="0" anchor="ctr"/>
           <a:lstStyle/>
           <a:p>
             <a:pPr algn="ctr" indent="0" marL="0">
